--- a/board-template/U1Dynamics_Board_Report_2026_04.pptx
+++ b/board-template/U1Dynamics_Board_Report_2026_04.pptx
@@ -2454,45 +2454,6 @@
       </p:grpSpPr>
       <p:sp>
         <p:nvSpPr>
-          <p:cNvPr id="2" name="Text 0"/>
-          <p:cNvSpPr/>
-          <p:nvPr/>
-        </p:nvSpPr>
-        <p:spPr>
-          <a:xfrm>
-            <a:off x="713232" y="566928"/>
-            <a:ext cx="1965960" cy="292608"/>
-          </a:xfrm>
-          <a:prstGeom prst="rect">
-            <a:avLst/>
-          </a:prstGeom>
-          <a:noFill/>
-          <a:ln/>
-        </p:spPr>
-        <p:txBody>
-          <a:bodyPr wrap="square" lIns="0" tIns="0" rIns="0" bIns="0" rtlCol="0" anchor="ctr"/>
-          <a:lstStyle/>
-          <a:p>
-            <a:pPr indent="0" marL="0">
-              <a:buNone/>
-            </a:pPr>
-            <a:r>
-              <a:rPr lang="en-US" sz="1050" b="1" dirty="0">
-                <a:solidFill>
-                  <a:srgbClr val="FFFFFF"/>
-                </a:solidFill>
-                <a:latin typeface="Aptos" pitchFamily="34" charset="0"/>
-                <a:ea typeface="Aptos" pitchFamily="34" charset="-122"/>
-                <a:cs typeface="Aptos" pitchFamily="34" charset="-120"/>
-              </a:rPr>
-              <a:t>U1DYNAMICS</a:t>
-            </a:r>
-            <a:endParaRPr lang="en-US" sz="1050" dirty="0"/>
-          </a:p>
-        </p:txBody>
-      </p:sp>
-      <p:sp>
-        <p:nvSpPr>
           <p:cNvPr id="3" name="Shape 1"/>
           <p:cNvSpPr/>
           <p:nvPr/>
@@ -2513,6 +2474,10 @@
             <a:prstDash val="solid"/>
           </a:ln>
         </p:spPr>
+        <p:txBody>
+          <a:bodyPr/>
+          <a:p/>
+        </p:txBody>
       </p:sp>
       <p:sp>
         <p:nvSpPr>
@@ -2698,6 +2663,10 @@
             <a:prstDash val="solid"/>
           </a:ln>
         </p:spPr>
+        <p:txBody>
+          <a:bodyPr/>
+          <a:p/>
+        </p:txBody>
       </p:sp>
       <p:sp>
         <p:nvSpPr>
@@ -2818,6 +2787,10 @@
             <a:prstDash val="solid"/>
           </a:ln>
         </p:spPr>
+        <p:txBody>
+          <a:bodyPr/>
+          <a:p/>
+        </p:txBody>
       </p:sp>
       <p:sp>
         <p:nvSpPr>
@@ -2899,6 +2872,30 @@
           </a:p>
         </p:txBody>
       </p:sp>
+      <p:pic>
+        <p:nvPicPr>
+          <p:cNvPr id="14" name="Picture 13" descr="u1d-logo-white.png"/>
+          <p:cNvPicPr>
+            <a:picLocks noChangeAspect="1"/>
+          </p:cNvPicPr>
+          <p:nvPr/>
+        </p:nvPicPr>
+        <p:blipFill>
+          <a:blip r:embed="rId3"/>
+          <a:stretch>
+            <a:fillRect/>
+          </a:stretch>
+        </p:blipFill>
+        <p:spPr>
+          <a:xfrm>
+            <a:off x="713232" y="566928"/>
+            <a:ext cx="1554480" cy="1010412"/>
+          </a:xfrm>
+          <a:prstGeom prst="rect">
+            <a:avLst/>
+          </a:prstGeom>
+        </p:spPr>
+      </p:pic>
     </p:spTree>
   </p:cSld>
   <p:clrMapOvr>

--- a/board-template/U1Dynamics_Board_Report_2026_04.pptx
+++ b/board-template/U1Dynamics_Board_Report_2026_04.pptx
@@ -16415,7 +16415,7 @@
                 <a:ea typeface="Aptos Display" pitchFamily="34" charset="-122"/>
                 <a:cs typeface="Aptos Display" pitchFamily="34" charset="-120"/>
               </a:rPr>
-              <a:t>The plant is not the bottleneck; inventory visibility is the open item</a:t>
+              <a:t>Capacity is adequate overall; the Quarts line is the real constraint</a:t>
             </a:r>
             <a:endParaRPr lang="en-US" sz="2400" dirty="0"/>
           </a:p>
@@ -16456,7 +16456,7 @@
                 <a:ea typeface="Aptos" pitchFamily="34" charset="-122"/>
                 <a:cs typeface="Aptos" pitchFamily="34" charset="-120"/>
               </a:rPr>
-              <a:t>April production ran ahead of billing, supply was stable, and quality was clean.</a:t>
+              <a:t>Q1 output rose 28% year over year. The plant has slack in aggregate, but the Quarts line is at its ceiling — and there is no operational-measurement or QA baseline yet.</a:t>
             </a:r>
             <a:endParaRPr lang="en-US" sz="1070" dirty="0"/>
           </a:p>
@@ -16484,6 +16484,10 @@
             <a:prstDash val="solid"/>
           </a:ln>
         </p:spPr>
+        <p:txBody>
+          <a:bodyPr/>
+          <a:p/>
+        </p:txBody>
       </p:sp>
       <p:sp>
         <p:nvSpPr>
@@ -16511,6 +16515,10 @@
             <a:prstDash val="solid"/>
           </a:ln>
         </p:spPr>
+        <p:txBody>
+          <a:bodyPr/>
+          <a:p/>
+        </p:txBody>
       </p:sp>
       <p:sp>
         <p:nvSpPr>
@@ -16547,7 +16555,7 @@
                 <a:ea typeface="Aptos" pitchFamily="34" charset="-122"/>
                 <a:cs typeface="Aptos" pitchFamily="34" charset="-120"/>
               </a:rPr>
-              <a:t>PRODUCED · APRIL</a:t>
+              <a:t>Q1 PRODUCTION</a:t>
             </a:r>
             <a:endParaRPr lang="en-US" sz="540" dirty="0"/>
           </a:p>
@@ -16588,7 +16596,7 @@
                 <a:ea typeface="Aptos Display" pitchFamily="34" charset="-122"/>
                 <a:cs typeface="Aptos Display" pitchFamily="34" charset="-120"/>
               </a:rPr>
-              <a:t>134,620</a:t>
+              <a:t>374,866</a:t>
             </a:r>
             <a:endParaRPr lang="en-US" sz="2400" dirty="0"/>
           </a:p>
@@ -16629,7 +16637,7 @@
                 <a:ea typeface="Aptos" pitchFamily="34" charset="-122"/>
                 <a:cs typeface="Aptos" pitchFamily="34" charset="-120"/>
               </a:rPr>
-              <a:t>gallons across 22 workdays</a:t>
+              <a:t>gal · +28.2% vs Q1 2025</a:t>
             </a:r>
             <a:endParaRPr lang="en-US" sz="650" dirty="0"/>
           </a:p>
@@ -16661,6 +16669,10 @@
             <a:prstDash val="solid"/>
           </a:ln>
         </p:spPr>
+        <p:txBody>
+          <a:bodyPr/>
+          <a:p/>
+        </p:txBody>
       </p:sp>
       <p:sp>
         <p:nvSpPr>
@@ -16697,7 +16709,7 @@
                 <a:ea typeface="Aptos" pitchFamily="34" charset="-122"/>
                 <a:cs typeface="Aptos" pitchFamily="34" charset="-120"/>
               </a:rPr>
-              <a:t>BILLED · APRIL</a:t>
+              <a:t>MONTHLY AVG</a:t>
             </a:r>
             <a:endParaRPr lang="en-US" sz="540" dirty="0"/>
           </a:p>
@@ -16738,7 +16750,7 @@
                 <a:ea typeface="Aptos Display" pitchFamily="34" charset="-122"/>
                 <a:cs typeface="Aptos Display" pitchFamily="34" charset="-120"/>
               </a:rPr>
-              <a:t>103,453</a:t>
+              <a:t>127,372</a:t>
             </a:r>
             <a:endParaRPr lang="en-US" sz="2400" dirty="0"/>
           </a:p>
@@ -16779,7 +16791,7 @@
                 <a:ea typeface="Aptos" pitchFamily="34" charset="-122"/>
                 <a:cs typeface="Aptos" pitchFamily="34" charset="-120"/>
               </a:rPr>
-              <a:t>gallons</a:t>
+              <a:t>gal · peak Mar 141,506</a:t>
             </a:r>
             <a:endParaRPr lang="en-US" sz="650" dirty="0"/>
           </a:p>
@@ -16811,6 +16823,10 @@
             <a:prstDash val="solid"/>
           </a:ln>
         </p:spPr>
+        <p:txBody>
+          <a:bodyPr/>
+          <a:p/>
+        </p:txBody>
       </p:sp>
       <p:sp>
         <p:nvSpPr>
@@ -16847,7 +16863,7 @@
                 <a:ea typeface="Aptos" pitchFamily="34" charset="-122"/>
                 <a:cs typeface="Aptos" pitchFamily="34" charset="-120"/>
               </a:rPr>
-              <a:t>INVENTORY BUILD</a:t>
+              <a:t>QUARTS LINE</a:t>
             </a:r>
             <a:endParaRPr lang="en-US" sz="540" dirty="0"/>
           </a:p>
@@ -16888,7 +16904,7 @@
                 <a:ea typeface="Aptos Display" pitchFamily="34" charset="-122"/>
                 <a:cs typeface="Aptos Display" pitchFamily="34" charset="-120"/>
               </a:rPr>
-              <a:t>≈31K</a:t>
+              <a:t>96.5%</a:t>
             </a:r>
             <a:endParaRPr lang="en-US" sz="2400" dirty="0"/>
           </a:p>
@@ -16929,7 +16945,7 @@
                 <a:ea typeface="Aptos" pitchFamily="34" charset="-122"/>
                 <a:cs typeface="Aptos" pitchFamily="34" charset="-120"/>
               </a:rPr>
-              <a:t>gallons in April</a:t>
+              <a:t>availability · primary bottleneck</a:t>
             </a:r>
             <a:endParaRPr lang="en-US" sz="650" dirty="0"/>
           </a:p>
@@ -16961,6 +16977,10 @@
             <a:prstDash val="solid"/>
           </a:ln>
         </p:spPr>
+        <p:txBody>
+          <a:bodyPr/>
+          <a:p/>
+        </p:txBody>
       </p:sp>
       <p:sp>
         <p:nvSpPr>
@@ -16997,7 +17017,7 @@
                 <a:ea typeface="Aptos" pitchFamily="34" charset="-122"/>
                 <a:cs typeface="Aptos" pitchFamily="34" charset="-120"/>
               </a:rPr>
-              <a:t>INCIDENTS</a:t>
+              <a:t>RUN-RATE</a:t>
             </a:r>
             <a:endParaRPr lang="en-US" sz="540" dirty="0"/>
           </a:p>
@@ -17038,7 +17058,7 @@
                 <a:ea typeface="Aptos Display" pitchFamily="34" charset="-122"/>
                 <a:cs typeface="Aptos Display" pitchFamily="34" charset="-120"/>
               </a:rPr>
-              <a:t>0</a:t>
+              <a:t>~1.50M</a:t>
             </a:r>
             <a:endParaRPr lang="en-US" sz="2400" dirty="0"/>
           </a:p>
@@ -17079,7 +17099,7 @@
                 <a:ea typeface="Aptos" pitchFamily="34" charset="-122"/>
                 <a:cs typeface="Aptos" pitchFamily="34" charset="-120"/>
               </a:rPr>
-              <a:t>quality, supply, or line-down</a:t>
+              <a:t>gal/yr annualized (Q1 linear)</a:t>
             </a:r>
             <a:endParaRPr lang="en-US" sz="650" dirty="0"/>
           </a:p>
@@ -17111,6 +17131,10 @@
             <a:prstDash val="solid"/>
           </a:ln>
         </p:spPr>
+        <p:txBody>
+          <a:bodyPr/>
+          <a:p/>
+        </p:txBody>
       </p:sp>
       <p:sp>
         <p:nvSpPr>
@@ -17188,7 +17212,7 @@
                 <a:ea typeface="Aptos" pitchFamily="34" charset="-122"/>
                 <a:cs typeface="Aptos" pitchFamily="34" charset="-120"/>
               </a:rPr>
-              <a:t>Production exceeded billed volume. Plant capacity was not the constraint.</a:t>
+              <a:t>Quarts line at its real ceiling (~1,208 gal/day, 96.5% availability) — the primary bottleneck. Batch lines (5-Qt, Box Gal) efficient when running (68% / 48%). Drum/Tote nominal capacity needs recalibration.</a:t>
             </a:r>
             <a:endParaRPr lang="en-US" sz="840" dirty="0"/>
           </a:p>
@@ -17220,6 +17244,10 @@
             <a:prstDash val="solid"/>
           </a:ln>
         </p:spPr>
+        <p:txBody>
+          <a:bodyPr/>
+          <a:p/>
+        </p:txBody>
       </p:sp>
       <p:sp>
         <p:nvSpPr>
@@ -17297,7 +17325,7 @@
                 <a:ea typeface="Aptos" pitchFamily="34" charset="-122"/>
                 <a:cs typeface="Aptos" pitchFamily="34" charset="-120"/>
               </a:rPr>
-              <a:t>No material raw-material, additive, packaging, or freight disruption affected the period.</a:t>
+              <a:t>Single active oil supplier (Lubrimar) plus packaging vendors with critical lead-time and quality exposure (Gal/5-Qt bottles, drums). Alternative drum supplier secured for Q2.</a:t>
             </a:r>
             <a:endParaRPr lang="en-US" sz="840" dirty="0"/>
           </a:p>
@@ -17329,6 +17357,10 @@
             <a:prstDash val="solid"/>
           </a:ln>
         </p:spPr>
+        <p:txBody>
+          <a:bodyPr/>
+          <a:p/>
+        </p:txBody>
       </p:sp>
       <p:sp>
         <p:nvSpPr>
@@ -17406,7 +17438,7 @@
                 <a:ea typeface="Aptos" pitchFamily="34" charset="-122"/>
                 <a:cs typeface="Aptos" pitchFamily="34" charset="-120"/>
               </a:rPr>
-              <a:t>No quality incidents, batch holds, non-conformances, or customer quality complaints were recorded.</a:t>
+              <a:t>Baseline gap: no formal QA records or finished-goods retains at the start of this tenure, and no OSHA 300 log. One minor PPE incident (safety glasses). QA formats now in development.</a:t>
             </a:r>
             <a:endParaRPr lang="en-US" sz="840" dirty="0"/>
           </a:p>
@@ -17440,6 +17472,10 @@
             <a:prstDash val="solid"/>
           </a:ln>
         </p:spPr>
+        <p:txBody>
+          <a:bodyPr/>
+          <a:p/>
+        </p:txBody>
       </p:sp>
       <p:sp>
         <p:nvSpPr>
@@ -17517,7 +17553,7 @@
                 <a:ea typeface="Aptos" pitchFamily="34" charset="-122"/>
                 <a:cs typeface="Aptos" pitchFamily="34" charset="-120"/>
               </a:rPr>
-              <a:t>The board should not over-invest time in plant execution. The open operational item is inventory value, days of cover, and production-vs-billing clarity.</a:t>
+              <a:t>The constraint is the Quarts line, not the plant as a whole. The larger gap is the absence of operational measurement and a QA baseline — both are being stood up now. Neither is a reason to slow growth.</a:t>
             </a:r>
             <a:endParaRPr lang="en-US" sz="870" dirty="0"/>
           </a:p>
@@ -17549,6 +17585,10 @@
             <a:prstDash val="solid"/>
           </a:ln>
         </p:spPr>
+        <p:txBody>
+          <a:bodyPr/>
+          <a:p/>
+        </p:txBody>
       </p:sp>
       <p:sp>
         <p:nvSpPr>
@@ -17626,7 +17666,7 @@
                 <a:ea typeface="Aptos" pitchFamily="34" charset="-122"/>
                 <a:cs typeface="Aptos" pitchFamily="34" charset="-120"/>
               </a:rPr>
-              <a:t>Ops / Finance to add beginning inventory, ending inventory, days of cover, and $ value of movement before next distribution.</a:t>
+              <a:t>Approve Quarts-line modernization / conversion to Gal/5-Qt, and stand up downtime, fill-accuracy, QA, and inventory-reconciliation measurement before next distribution.</a:t>
             </a:r>
             <a:endParaRPr lang="en-US" sz="770" dirty="0"/>
           </a:p>
@@ -17654,6 +17694,10 @@
             <a:prstDash val="solid"/>
           </a:ln>
         </p:spPr>
+        <p:txBody>
+          <a:bodyPr/>
+          <a:p/>
+        </p:txBody>
       </p:sp>
       <p:sp>
         <p:nvSpPr>
